--- a/src/assets/downloads/example-deck-showship.pptx
+++ b/src/assets/downloads/example-deck-showship.pptx
@@ -2360,7 +2360,7 @@
       </p:grpSpPr>
       <p:pic>
         <p:nvPicPr>
-          <p:cNvPr id="2" name="Image 0" descr="/var/folders/lw/rmylcyvd5rjfxk9g1z9rrm8w0000gq/T/showship-deck-o8V0pU/trail_bookend.png">    </p:cNvPr>
+          <p:cNvPr id="2" name="Image 0" descr="/var/folders/lw/rmylcyvd5rjfxk9g1z9rrm8w0000gq/T/showship-deck-dePtSj/trail_bookend.png">    </p:cNvPr>
           <p:cNvPicPr>
             <a:picLocks noChangeAspect="1"/>
           </p:cNvPicPr>
@@ -2384,7 +2384,7 @@
       </p:pic>
       <p:pic>
         <p:nvPicPr>
-          <p:cNvPr id="3" name="Image 1" descr="/var/folders/lw/rmylcyvd5rjfxk9g1z9rrm8w0000gq/T/showship-deck-o8V0pU/logo_trimmed.png">    </p:cNvPr>
+          <p:cNvPr id="3" name="Image 1" descr="/var/folders/lw/rmylcyvd5rjfxk9g1z9rrm8w0000gq/T/showship-deck-dePtSj/logo_trimmed.png">    </p:cNvPr>
           <p:cNvPicPr>
             <a:picLocks noChangeAspect="1"/>
           </p:cNvPicPr>
@@ -2705,7 +2705,7 @@
       </p:sp>
       <p:pic>
         <p:nvPicPr>
-          <p:cNvPr id="11" name="Image 2" descr="/var/folders/lw/rmylcyvd5rjfxk9g1z9rrm8w0000gq/T/showship-deck-o8V0pU/trail_mark.png">    </p:cNvPr>
+          <p:cNvPr id="11" name="Image 2" descr="/var/folders/lw/rmylcyvd5rjfxk9g1z9rrm8w0000gq/T/showship-deck-dePtSj/trail_mark.png">    </p:cNvPr>
           <p:cNvPicPr>
             <a:picLocks noChangeAspect="1"/>
           </p:cNvPicPr>
@@ -2814,7 +2814,7 @@
       </p:grpSpPr>
       <p:pic>
         <p:nvPicPr>
-          <p:cNvPr id="2" name="Image 0" descr="/var/folders/lw/rmylcyvd5rjfxk9g1z9rrm8w0000gq/T/showship-deck-o8V0pU/trail_corner.png">    </p:cNvPr>
+          <p:cNvPr id="2" name="Image 0" descr="/var/folders/lw/rmylcyvd5rjfxk9g1z9rrm8w0000gq/T/showship-deck-dePtSj/trail_corner.png">    </p:cNvPr>
           <p:cNvPicPr>
             <a:picLocks noChangeAspect="1"/>
           </p:cNvPicPr>
@@ -2938,7 +2938,7 @@
       </p:sp>
       <p:pic>
         <p:nvPicPr>
-          <p:cNvPr id="6" name="Image 1" descr="/var/folders/lw/rmylcyvd5rjfxk9g1z9rrm8w0000gq/T/showship-deck-o8V0pU/trail_mark.png">    </p:cNvPr>
+          <p:cNvPr id="6" name="Image 1" descr="/var/folders/lw/rmylcyvd5rjfxk9g1z9rrm8w0000gq/T/showship-deck-dePtSj/trail_mark.png">    </p:cNvPr>
           <p:cNvPicPr>
             <a:picLocks noChangeAspect="1"/>
           </p:cNvPicPr>
@@ -3512,7 +3512,7 @@
       </p:grpSpPr>
       <p:pic>
         <p:nvPicPr>
-          <p:cNvPr id="2" name="Image 0" descr="/var/folders/lw/rmylcyvd5rjfxk9g1z9rrm8w0000gq/T/showship-deck-o8V0pU/trail_corner.png">    </p:cNvPr>
+          <p:cNvPr id="2" name="Image 0" descr="/var/folders/lw/rmylcyvd5rjfxk9g1z9rrm8w0000gq/T/showship-deck-dePtSj/trail_corner.png">    </p:cNvPr>
           <p:cNvPicPr>
             <a:picLocks noChangeAspect="1"/>
           </p:cNvPicPr>
@@ -3636,7 +3636,7 @@
       </p:sp>
       <p:pic>
         <p:nvPicPr>
-          <p:cNvPr id="6" name="Image 1" descr="/var/folders/lw/rmylcyvd5rjfxk9g1z9rrm8w0000gq/T/showship-deck-o8V0pU/trail_mark.png">    </p:cNvPr>
+          <p:cNvPr id="6" name="Image 1" descr="/var/folders/lw/rmylcyvd5rjfxk9g1z9rrm8w0000gq/T/showship-deck-dePtSj/trail_mark.png">    </p:cNvPr>
           <p:cNvPicPr>
             <a:picLocks noChangeAspect="1"/>
           </p:cNvPicPr>
@@ -5136,7 +5136,7 @@
       </p:grpSpPr>
       <p:pic>
         <p:nvPicPr>
-          <p:cNvPr id="2" name="Image 0" descr="/var/folders/lw/rmylcyvd5rjfxk9g1z9rrm8w0000gq/T/showship-deck-o8V0pU/trail_bookend.png">    </p:cNvPr>
+          <p:cNvPr id="2" name="Image 0" descr="/var/folders/lw/rmylcyvd5rjfxk9g1z9rrm8w0000gq/T/showship-deck-dePtSj/trail_bookend.png">    </p:cNvPr>
           <p:cNvPicPr>
             <a:picLocks noChangeAspect="1"/>
           </p:cNvPicPr>
@@ -5160,7 +5160,7 @@
       </p:pic>
       <p:pic>
         <p:nvPicPr>
-          <p:cNvPr id="3" name="Image 1" descr="/var/folders/lw/rmylcyvd5rjfxk9g1z9rrm8w0000gq/T/showship-deck-o8V0pU/logo_trimmed.png">    </p:cNvPr>
+          <p:cNvPr id="3" name="Image 1" descr="/var/folders/lw/rmylcyvd5rjfxk9g1z9rrm8w0000gq/T/showship-deck-dePtSj/logo_trimmed.png">    </p:cNvPr>
           <p:cNvPicPr>
             <a:picLocks noChangeAspect="1"/>
           </p:cNvPicPr>
@@ -5458,7 +5458,7 @@
       </p:sp>
       <p:pic>
         <p:nvPicPr>
-          <p:cNvPr id="11" name="Image 2" descr="/var/folders/lw/rmylcyvd5rjfxk9g1z9rrm8w0000gq/T/showship-deck-o8V0pU/trail_mark.png">    </p:cNvPr>
+          <p:cNvPr id="11" name="Image 2" descr="/var/folders/lw/rmylcyvd5rjfxk9g1z9rrm8w0000gq/T/showship-deck-dePtSj/trail_mark.png">    </p:cNvPr>
           <p:cNvPicPr>
             <a:picLocks noChangeAspect="1"/>
           </p:cNvPicPr>
@@ -5567,7 +5567,7 @@
       </p:grpSpPr>
       <p:pic>
         <p:nvPicPr>
-          <p:cNvPr id="2" name="Image 0" descr="/var/folders/lw/rmylcyvd5rjfxk9g1z9rrm8w0000gq/T/showship-deck-o8V0pU/trail_corner.png">    </p:cNvPr>
+          <p:cNvPr id="2" name="Image 0" descr="/var/folders/lw/rmylcyvd5rjfxk9g1z9rrm8w0000gq/T/showship-deck-dePtSj/trail_corner.png">    </p:cNvPr>
           <p:cNvPicPr>
             <a:picLocks noChangeAspect="1"/>
           </p:cNvPicPr>
@@ -5691,7 +5691,7 @@
       </p:sp>
       <p:pic>
         <p:nvPicPr>
-          <p:cNvPr id="6" name="Image 1" descr="/var/folders/lw/rmylcyvd5rjfxk9g1z9rrm8w0000gq/T/showship-deck-o8V0pU/trail_mark.png">    </p:cNvPr>
+          <p:cNvPr id="6" name="Image 1" descr="/var/folders/lw/rmylcyvd5rjfxk9g1z9rrm8w0000gq/T/showship-deck-dePtSj/trail_mark.png">    </p:cNvPr>
           <p:cNvPicPr>
             <a:picLocks noChangeAspect="1"/>
           </p:cNvPicPr>
@@ -7009,7 +7009,7 @@
       </p:grpSpPr>
       <p:pic>
         <p:nvPicPr>
-          <p:cNvPr id="2" name="Image 0" descr="/var/folders/lw/rmylcyvd5rjfxk9g1z9rrm8w0000gq/T/showship-deck-o8V0pU/trail_corner.png">    </p:cNvPr>
+          <p:cNvPr id="2" name="Image 0" descr="/var/folders/lw/rmylcyvd5rjfxk9g1z9rrm8w0000gq/T/showship-deck-dePtSj/trail_corner.png">    </p:cNvPr>
           <p:cNvPicPr>
             <a:picLocks noChangeAspect="1"/>
           </p:cNvPicPr>
@@ -7133,7 +7133,7 @@
       </p:sp>
       <p:pic>
         <p:nvPicPr>
-          <p:cNvPr id="6" name="Image 1" descr="/var/folders/lw/rmylcyvd5rjfxk9g1z9rrm8w0000gq/T/showship-deck-o8V0pU/trail_mark.png">    </p:cNvPr>
+          <p:cNvPr id="6" name="Image 1" descr="/var/folders/lw/rmylcyvd5rjfxk9g1z9rrm8w0000gq/T/showship-deck-dePtSj/trail_mark.png">    </p:cNvPr>
           <p:cNvPicPr>
             <a:picLocks noChangeAspect="1"/>
           </p:cNvPicPr>
@@ -7310,7 +7310,7 @@
       </p:sp>
       <p:pic>
         <p:nvPicPr>
-          <p:cNvPr id="11" name="Image 2" descr="/var/folders/lw/rmylcyvd5rjfxk9g1z9rrm8w0000gq/T/showship-deck-o8V0pU/trail_tl_1.png">    </p:cNvPr>
+          <p:cNvPr id="11" name="Image 2" descr="/var/folders/lw/rmylcyvd5rjfxk9g1z9rrm8w0000gq/T/showship-deck-dePtSj/trail_tl_1.png">    </p:cNvPr>
           <p:cNvPicPr>
             <a:picLocks noChangeAspect="1"/>
           </p:cNvPicPr>
@@ -8270,7 +8270,7 @@
       </p:grpSpPr>
       <p:pic>
         <p:nvPicPr>
-          <p:cNvPr id="2" name="Image 0" descr="/var/folders/lw/rmylcyvd5rjfxk9g1z9rrm8w0000gq/T/showship-deck-o8V0pU/trail_corner.png">    </p:cNvPr>
+          <p:cNvPr id="2" name="Image 0" descr="/var/folders/lw/rmylcyvd5rjfxk9g1z9rrm8w0000gq/T/showship-deck-dePtSj/trail_corner.png">    </p:cNvPr>
           <p:cNvPicPr>
             <a:picLocks noChangeAspect="1"/>
           </p:cNvPicPr>
@@ -8394,7 +8394,7 @@
       </p:sp>
       <p:pic>
         <p:nvPicPr>
-          <p:cNvPr id="6" name="Image 1" descr="/var/folders/lw/rmylcyvd5rjfxk9g1z9rrm8w0000gq/T/showship-deck-o8V0pU/trail_mark.png">    </p:cNvPr>
+          <p:cNvPr id="6" name="Image 1" descr="/var/folders/lw/rmylcyvd5rjfxk9g1z9rrm8w0000gq/T/showship-deck-dePtSj/trail_mark.png">    </p:cNvPr>
           <p:cNvPicPr>
             <a:picLocks noChangeAspect="1"/>
           </p:cNvPicPr>
@@ -9671,7 +9671,7 @@
       </p:grpSpPr>
       <p:pic>
         <p:nvPicPr>
-          <p:cNvPr id="2" name="Image 0" descr="/var/folders/lw/rmylcyvd5rjfxk9g1z9rrm8w0000gq/T/showship-deck-o8V0pU/trail_corner.png">    </p:cNvPr>
+          <p:cNvPr id="2" name="Image 0" descr="/var/folders/lw/rmylcyvd5rjfxk9g1z9rrm8w0000gq/T/showship-deck-dePtSj/trail_corner.png">    </p:cNvPr>
           <p:cNvPicPr>
             <a:picLocks noChangeAspect="1"/>
           </p:cNvPicPr>
@@ -9795,7 +9795,7 @@
       </p:sp>
       <p:pic>
         <p:nvPicPr>
-          <p:cNvPr id="6" name="Image 1" descr="/var/folders/lw/rmylcyvd5rjfxk9g1z9rrm8w0000gq/T/showship-deck-o8V0pU/trail_mark.png">    </p:cNvPr>
+          <p:cNvPr id="6" name="Image 1" descr="/var/folders/lw/rmylcyvd5rjfxk9g1z9rrm8w0000gq/T/showship-deck-dePtSj/trail_mark.png">    </p:cNvPr>
           <p:cNvPicPr>
             <a:picLocks noChangeAspect="1"/>
           </p:cNvPicPr>
@@ -11335,7 +11335,7 @@
       </p:grpSpPr>
       <p:pic>
         <p:nvPicPr>
-          <p:cNvPr id="2" name="Image 0" descr="/var/folders/lw/rmylcyvd5rjfxk9g1z9rrm8w0000gq/T/showship-deck-o8V0pU/trail_corner.png">    </p:cNvPr>
+          <p:cNvPr id="2" name="Image 0" descr="/var/folders/lw/rmylcyvd5rjfxk9g1z9rrm8w0000gq/T/showship-deck-dePtSj/trail_corner.png">    </p:cNvPr>
           <p:cNvPicPr>
             <a:picLocks noChangeAspect="1"/>
           </p:cNvPicPr>
@@ -11459,7 +11459,7 @@
       </p:sp>
       <p:pic>
         <p:nvPicPr>
-          <p:cNvPr id="6" name="Image 1" descr="/var/folders/lw/rmylcyvd5rjfxk9g1z9rrm8w0000gq/T/showship-deck-o8V0pU/trail_mark.png">    </p:cNvPr>
+          <p:cNvPr id="6" name="Image 1" descr="/var/folders/lw/rmylcyvd5rjfxk9g1z9rrm8w0000gq/T/showship-deck-dePtSj/trail_mark.png">    </p:cNvPr>
           <p:cNvPicPr>
             <a:picLocks noChangeAspect="1"/>
           </p:cNvPicPr>
@@ -11582,7 +11582,7 @@
         <p:spPr>
           <a:xfrm>
             <a:off x="640080" y="1783080"/>
-            <a:ext cx="3453384" cy="4160520"/>
+            <a:ext cx="3453384" cy="3694938"/>
           </a:xfrm>
           <a:prstGeom prst="roundRect">
             <a:avLst>
@@ -12157,7 +12157,7 @@
         <p:spPr>
           <a:xfrm>
             <a:off x="4367784" y="1783080"/>
-            <a:ext cx="3453384" cy="4160520"/>
+            <a:ext cx="3453384" cy="3694938"/>
           </a:xfrm>
           <a:prstGeom prst="roundRect">
             <a:avLst>
@@ -12510,7 +12510,7 @@
         <p:spPr>
           <a:xfrm>
             <a:off x="4843272" y="4536186"/>
-            <a:ext cx="2749296" cy="390144"/>
+            <a:ext cx="2749296" cy="222504"/>
           </a:xfrm>
           <a:prstGeom prst="rect">
             <a:avLst/>
@@ -12548,7 +12548,7 @@
         </p:nvSpPr>
         <p:spPr>
           <a:xfrm>
-            <a:off x="4596384" y="4981194"/>
+            <a:off x="4596384" y="4813554"/>
             <a:ext cx="118872" cy="118872"/>
           </a:xfrm>
           <a:prstGeom prst="ellipse">
@@ -12568,7 +12568,7 @@
         </p:nvSpPr>
         <p:spPr>
           <a:xfrm>
-            <a:off x="4843272" y="4926330"/>
+            <a:off x="4843272" y="4758690"/>
             <a:ext cx="2749296" cy="222504"/>
           </a:xfrm>
           <a:prstGeom prst="rect">
@@ -12607,7 +12607,7 @@
         </p:nvSpPr>
         <p:spPr>
           <a:xfrm>
-            <a:off x="4596384" y="5203698"/>
+            <a:off x="4596384" y="5036058"/>
             <a:ext cx="118872" cy="118872"/>
           </a:xfrm>
           <a:prstGeom prst="ellipse">
@@ -12627,7 +12627,7 @@
         </p:nvSpPr>
         <p:spPr>
           <a:xfrm>
-            <a:off x="4843272" y="5148834"/>
+            <a:off x="4843272" y="4981194"/>
             <a:ext cx="2749296" cy="222504"/>
           </a:xfrm>
           <a:prstGeom prst="rect">
@@ -12667,7 +12667,7 @@
         <p:spPr>
           <a:xfrm>
             <a:off x="8095488" y="1783080"/>
-            <a:ext cx="3453384" cy="4160520"/>
+            <a:ext cx="3453384" cy="3694938"/>
           </a:xfrm>
           <a:prstGeom prst="roundRect">
             <a:avLst>
@@ -12860,7 +12860,7 @@
         <p:spPr>
           <a:xfrm>
             <a:off x="8324088" y="2871597"/>
-            <a:ext cx="2996184" cy="792480"/>
+            <a:ext cx="2996184" cy="594360"/>
           </a:xfrm>
           <a:prstGeom prst="rect">
             <a:avLst/>
@@ -12901,7 +12901,7 @@
         </p:nvSpPr>
         <p:spPr>
           <a:xfrm>
-            <a:off x="8324088" y="3801237"/>
+            <a:off x="8324088" y="3603117"/>
             <a:ext cx="2996184" cy="228600"/>
           </a:xfrm>
           <a:prstGeom prst="rect">
@@ -12940,7 +12940,7 @@
         </p:nvSpPr>
         <p:spPr>
           <a:xfrm>
-            <a:off x="8324088" y="4130421"/>
+            <a:off x="8324088" y="3932301"/>
             <a:ext cx="118872" cy="118872"/>
           </a:xfrm>
           <a:prstGeom prst="ellipse">
@@ -12962,7 +12962,7 @@
         </p:nvSpPr>
         <p:spPr>
           <a:xfrm>
-            <a:off x="8570976" y="4075557"/>
+            <a:off x="8570976" y="3877437"/>
             <a:ext cx="2749296" cy="222504"/>
           </a:xfrm>
           <a:prstGeom prst="rect">
@@ -13001,7 +13001,7 @@
         </p:nvSpPr>
         <p:spPr>
           <a:xfrm>
-            <a:off x="8324088" y="4352925"/>
+            <a:off x="8324088" y="4154805"/>
             <a:ext cx="118872" cy="118872"/>
           </a:xfrm>
           <a:prstGeom prst="ellipse">
@@ -13023,7 +13023,7 @@
         </p:nvSpPr>
         <p:spPr>
           <a:xfrm>
-            <a:off x="8570976" y="4298061"/>
+            <a:off x="8570976" y="4099941"/>
             <a:ext cx="2749296" cy="222504"/>
           </a:xfrm>
           <a:prstGeom prst="rect">
@@ -13062,7 +13062,7 @@
         </p:nvSpPr>
         <p:spPr>
           <a:xfrm>
-            <a:off x="8324088" y="4575429"/>
+            <a:off x="8324088" y="4377309"/>
             <a:ext cx="118872" cy="118872"/>
           </a:xfrm>
           <a:prstGeom prst="ellipse">
@@ -13084,7 +13084,7 @@
         </p:nvSpPr>
         <p:spPr>
           <a:xfrm>
-            <a:off x="8570976" y="4520565"/>
+            <a:off x="8570976" y="4322445"/>
             <a:ext cx="2749296" cy="222504"/>
           </a:xfrm>
           <a:prstGeom prst="rect">
@@ -13123,7 +13123,7 @@
         </p:nvSpPr>
         <p:spPr>
           <a:xfrm>
-            <a:off x="640080" y="5989320"/>
+            <a:off x="640080" y="5615178"/>
             <a:ext cx="10908792" cy="274320"/>
           </a:xfrm>
           <a:prstGeom prst="rect">
@@ -13188,7 +13188,7 @@
       </p:grpSpPr>
       <p:pic>
         <p:nvPicPr>
-          <p:cNvPr id="2" name="Image 0" descr="/var/folders/lw/rmylcyvd5rjfxk9g1z9rrm8w0000gq/T/showship-deck-o8V0pU/trail_corner.png">    </p:cNvPr>
+          <p:cNvPr id="2" name="Image 0" descr="/var/folders/lw/rmylcyvd5rjfxk9g1z9rrm8w0000gq/T/showship-deck-dePtSj/trail_corner.png">    </p:cNvPr>
           <p:cNvPicPr>
             <a:picLocks noChangeAspect="1"/>
           </p:cNvPicPr>
@@ -13312,7 +13312,7 @@
       </p:sp>
       <p:pic>
         <p:nvPicPr>
-          <p:cNvPr id="6" name="Image 1" descr="/var/folders/lw/rmylcyvd5rjfxk9g1z9rrm8w0000gq/T/showship-deck-o8V0pU/trail_mark.png">    </p:cNvPr>
+          <p:cNvPr id="6" name="Image 1" descr="/var/folders/lw/rmylcyvd5rjfxk9g1z9rrm8w0000gq/T/showship-deck-dePtSj/trail_mark.png">    </p:cNvPr>
           <p:cNvPicPr>
             <a:picLocks noChangeAspect="1"/>
           </p:cNvPicPr>
@@ -13804,7 +13804,7 @@
       </p:sp>
       <p:pic>
         <p:nvPicPr>
-          <p:cNvPr id="20" name="Image 2" descr="/var/folders/lw/rmylcyvd5rjfxk9g1z9rrm8w0000gq/T/showship-deck-o8V0pU/iconc_Check_FFFFFF.png">    </p:cNvPr>
+          <p:cNvPr id="20" name="Image 2" descr="/var/folders/lw/rmylcyvd5rjfxk9g1z9rrm8w0000gq/T/showship-deck-dePtSj/iconc_Check_FFFFFF.png">    </p:cNvPr>
           <p:cNvPicPr>
             <a:picLocks noChangeAspect="1"/>
           </p:cNvPicPr>
@@ -14026,7 +14026,7 @@
       </p:sp>
       <p:pic>
         <p:nvPicPr>
-          <p:cNvPr id="27" name="Image 3" descr="/var/folders/lw/rmylcyvd5rjfxk9g1z9rrm8w0000gq/T/showship-deck-o8V0pU/iconc_Wrench_FFFFFF.png">    </p:cNvPr>
+          <p:cNvPr id="27" name="Image 3" descr="/var/folders/lw/rmylcyvd5rjfxk9g1z9rrm8w0000gq/T/showship-deck-dePtSj/iconc_Wrench_FFFFFF.png">    </p:cNvPr>
           <p:cNvPicPr>
             <a:picLocks noChangeAspect="1"/>
           </p:cNvPicPr>
@@ -14248,7 +14248,7 @@
       </p:sp>
       <p:pic>
         <p:nvPicPr>
-          <p:cNvPr id="34" name="Image 4" descr="/var/folders/lw/rmylcyvd5rjfxk9g1z9rrm8w0000gq/T/showship-deck-o8V0pU/iconc_Check_FFFFFF.png">    </p:cNvPr>
+          <p:cNvPr id="34" name="Image 4" descr="/var/folders/lw/rmylcyvd5rjfxk9g1z9rrm8w0000gq/T/showship-deck-dePtSj/iconc_Check_FFFFFF.png">    </p:cNvPr>
           <p:cNvPicPr>
             <a:picLocks noChangeAspect="1"/>
           </p:cNvPicPr>
@@ -14487,7 +14487,7 @@
       </p:grpSpPr>
       <p:pic>
         <p:nvPicPr>
-          <p:cNvPr id="2" name="Image 0" descr="/var/folders/lw/rmylcyvd5rjfxk9g1z9rrm8w0000gq/T/showship-deck-o8V0pU/trail_corner.png">    </p:cNvPr>
+          <p:cNvPr id="2" name="Image 0" descr="/var/folders/lw/rmylcyvd5rjfxk9g1z9rrm8w0000gq/T/showship-deck-dePtSj/trail_corner.png">    </p:cNvPr>
           <p:cNvPicPr>
             <a:picLocks noChangeAspect="1"/>
           </p:cNvPicPr>
@@ -14611,7 +14611,7 @@
       </p:sp>
       <p:pic>
         <p:nvPicPr>
-          <p:cNvPr id="6" name="Image 1" descr="/var/folders/lw/rmylcyvd5rjfxk9g1z9rrm8w0000gq/T/showship-deck-o8V0pU/trail_mark.png">    </p:cNvPr>
+          <p:cNvPr id="6" name="Image 1" descr="/var/folders/lw/rmylcyvd5rjfxk9g1z9rrm8w0000gq/T/showship-deck-dePtSj/trail_mark.png">    </p:cNvPr>
           <p:cNvPicPr>
             <a:picLocks noChangeAspect="1"/>
           </p:cNvPicPr>
@@ -14803,7 +14803,7 @@
       </p:sp>
       <p:pic>
         <p:nvPicPr>
-          <p:cNvPr id="12" name="Image 2" descr="/var/folders/lw/rmylcyvd5rjfxk9g1z9rrm8w0000gq/T/showship-deck-o8V0pU/iconc_TriangleAlert_FFFFFF.png">    </p:cNvPr>
+          <p:cNvPr id="12" name="Image 2" descr="/var/folders/lw/rmylcyvd5rjfxk9g1z9rrm8w0000gq/T/showship-deck-dePtSj/iconc_TriangleAlert_FFFFFF.png">    </p:cNvPr>
           <p:cNvPicPr>
             <a:picLocks noChangeAspect="1"/>
           </p:cNvPicPr>
@@ -15133,7 +15133,7 @@
       </p:sp>
       <p:pic>
         <p:nvPicPr>
-          <p:cNvPr id="21" name="Image 3" descr="/var/folders/lw/rmylcyvd5rjfxk9g1z9rrm8w0000gq/T/showship-deck-o8V0pU/iconc_MessageCircleQuestion_FFFFFF.png">    </p:cNvPr>
+          <p:cNvPr id="21" name="Image 3" descr="/var/folders/lw/rmylcyvd5rjfxk9g1z9rrm8w0000gq/T/showship-deck-dePtSj/iconc_MessageCircleQuestion_FFFFFF.png">    </p:cNvPr>
           <p:cNvPicPr>
             <a:picLocks noChangeAspect="1"/>
           </p:cNvPicPr>
@@ -15419,7 +15419,7 @@
       </p:grpSpPr>
       <p:pic>
         <p:nvPicPr>
-          <p:cNvPr id="2" name="Image 0" descr="/var/folders/lw/rmylcyvd5rjfxk9g1z9rrm8w0000gq/T/showship-deck-o8V0pU/trail_corner.png">    </p:cNvPr>
+          <p:cNvPr id="2" name="Image 0" descr="/var/folders/lw/rmylcyvd5rjfxk9g1z9rrm8w0000gq/T/showship-deck-dePtSj/trail_corner.png">    </p:cNvPr>
           <p:cNvPicPr>
             <a:picLocks noChangeAspect="1"/>
           </p:cNvPicPr>
@@ -15543,7 +15543,7 @@
       </p:sp>
       <p:pic>
         <p:nvPicPr>
-          <p:cNvPr id="6" name="Image 1" descr="/var/folders/lw/rmylcyvd5rjfxk9g1z9rrm8w0000gq/T/showship-deck-o8V0pU/trail_mark.png">    </p:cNvPr>
+          <p:cNvPr id="6" name="Image 1" descr="/var/folders/lw/rmylcyvd5rjfxk9g1z9rrm8w0000gq/T/showship-deck-dePtSj/trail_mark.png">    </p:cNvPr>
           <p:cNvPicPr>
             <a:picLocks noChangeAspect="1"/>
           </p:cNvPicPr>

--- a/src/assets/downloads/example-deck-showship.pptx
+++ b/src/assets/downloads/example-deck-showship.pptx
@@ -2360,7 +2360,7 @@
       </p:grpSpPr>
       <p:pic>
         <p:nvPicPr>
-          <p:cNvPr id="2" name="Image 0" descr="/var/folders/lw/rmylcyvd5rjfxk9g1z9rrm8w0000gq/T/showship-deck-dePtSj/trail_bookend.png">    </p:cNvPr>
+          <p:cNvPr id="2" name="Image 0" descr="/var/folders/lw/rmylcyvd5rjfxk9g1z9rrm8w0000gq/T/showship-deck-hW3qWQ/trail_bookend.png">    </p:cNvPr>
           <p:cNvPicPr>
             <a:picLocks noChangeAspect="1"/>
           </p:cNvPicPr>
@@ -2384,7 +2384,7 @@
       </p:pic>
       <p:pic>
         <p:nvPicPr>
-          <p:cNvPr id="3" name="Image 1" descr="/var/folders/lw/rmylcyvd5rjfxk9g1z9rrm8w0000gq/T/showship-deck-dePtSj/logo_trimmed.png">    </p:cNvPr>
+          <p:cNvPr id="3" name="Image 1" descr="/var/folders/lw/rmylcyvd5rjfxk9g1z9rrm8w0000gq/T/showship-deck-hW3qWQ/logo_trimmed.png">    </p:cNvPr>
           <p:cNvPicPr>
             <a:picLocks noChangeAspect="1"/>
           </p:cNvPicPr>
@@ -2705,7 +2705,7 @@
       </p:sp>
       <p:pic>
         <p:nvPicPr>
-          <p:cNvPr id="11" name="Image 2" descr="/var/folders/lw/rmylcyvd5rjfxk9g1z9rrm8w0000gq/T/showship-deck-dePtSj/trail_mark.png">    </p:cNvPr>
+          <p:cNvPr id="11" name="Image 2" descr="/var/folders/lw/rmylcyvd5rjfxk9g1z9rrm8w0000gq/T/showship-deck-hW3qWQ/trail_mark.png">    </p:cNvPr>
           <p:cNvPicPr>
             <a:picLocks noChangeAspect="1"/>
           </p:cNvPicPr>
@@ -2814,7 +2814,7 @@
       </p:grpSpPr>
       <p:pic>
         <p:nvPicPr>
-          <p:cNvPr id="2" name="Image 0" descr="/var/folders/lw/rmylcyvd5rjfxk9g1z9rrm8w0000gq/T/showship-deck-dePtSj/trail_corner.png">    </p:cNvPr>
+          <p:cNvPr id="2" name="Image 0" descr="/var/folders/lw/rmylcyvd5rjfxk9g1z9rrm8w0000gq/T/showship-deck-hW3qWQ/trail_corner.png">    </p:cNvPr>
           <p:cNvPicPr>
             <a:picLocks noChangeAspect="1"/>
           </p:cNvPicPr>
@@ -2938,7 +2938,7 @@
       </p:sp>
       <p:pic>
         <p:nvPicPr>
-          <p:cNvPr id="6" name="Image 1" descr="/var/folders/lw/rmylcyvd5rjfxk9g1z9rrm8w0000gq/T/showship-deck-dePtSj/trail_mark.png">    </p:cNvPr>
+          <p:cNvPr id="6" name="Image 1" descr="/var/folders/lw/rmylcyvd5rjfxk9g1z9rrm8w0000gq/T/showship-deck-hW3qWQ/trail_mark.png">    </p:cNvPr>
           <p:cNvPicPr>
             <a:picLocks noChangeAspect="1"/>
           </p:cNvPicPr>
@@ -3512,7 +3512,7 @@
       </p:grpSpPr>
       <p:pic>
         <p:nvPicPr>
-          <p:cNvPr id="2" name="Image 0" descr="/var/folders/lw/rmylcyvd5rjfxk9g1z9rrm8w0000gq/T/showship-deck-dePtSj/trail_corner.png">    </p:cNvPr>
+          <p:cNvPr id="2" name="Image 0" descr="/var/folders/lw/rmylcyvd5rjfxk9g1z9rrm8w0000gq/T/showship-deck-hW3qWQ/trail_corner.png">    </p:cNvPr>
           <p:cNvPicPr>
             <a:picLocks noChangeAspect="1"/>
           </p:cNvPicPr>
@@ -3636,7 +3636,7 @@
       </p:sp>
       <p:pic>
         <p:nvPicPr>
-          <p:cNvPr id="6" name="Image 1" descr="/var/folders/lw/rmylcyvd5rjfxk9g1z9rrm8w0000gq/T/showship-deck-dePtSj/trail_mark.png">    </p:cNvPr>
+          <p:cNvPr id="6" name="Image 1" descr="/var/folders/lw/rmylcyvd5rjfxk9g1z9rrm8w0000gq/T/showship-deck-hW3qWQ/trail_mark.png">    </p:cNvPr>
           <p:cNvPicPr>
             <a:picLocks noChangeAspect="1"/>
           </p:cNvPicPr>
@@ -5049,8 +5049,8 @@
         </p:nvSpPr>
         <p:spPr>
           <a:xfrm>
-            <a:off x="10735056" y="5344668"/>
-            <a:ext cx="585216" cy="274320"/>
+            <a:off x="10190988" y="5344668"/>
+            <a:ext cx="1129284" cy="274320"/>
           </a:xfrm>
           <a:prstGeom prst="roundRect">
             <a:avLst>
@@ -5058,7 +5058,7 @@
             </a:avLst>
           </a:prstGeom>
           <a:solidFill>
-            <a:srgbClr val="6C4CF5"/>
+            <a:srgbClr val="F0F0F3"/>
           </a:solidFill>
           <a:ln/>
         </p:spPr>
@@ -5071,8 +5071,8 @@
         </p:nvSpPr>
         <p:spPr>
           <a:xfrm>
-            <a:off x="10735056" y="5344668"/>
-            <a:ext cx="585216" cy="274320"/>
+            <a:off x="10190988" y="5344668"/>
+            <a:ext cx="1129284" cy="274320"/>
           </a:xfrm>
           <a:prstGeom prst="rect">
             <a:avLst/>
@@ -5090,13 +5090,13 @@
             <a:r>
               <a:rPr lang="en-US" sz="1100" b="1" dirty="0">
                 <a:solidFill>
-                  <a:srgbClr val="FFFFFF"/>
-                </a:solidFill>
-                <a:latin typeface="Poppins" pitchFamily="34" charset="0"/>
-                <a:ea typeface="Poppins" pitchFamily="34" charset="-122"/>
-                <a:cs typeface="Poppins" pitchFamily="34" charset="-120"/>
-              </a:rPr>
-              <a:t>Done</a:t>
+                  <a:srgbClr val="9A98B0"/>
+                </a:solidFill>
+                <a:latin typeface="Poppins" pitchFamily="34" charset="0"/>
+                <a:ea typeface="Poppins" pitchFamily="34" charset="-122"/>
+                <a:cs typeface="Poppins" pitchFamily="34" charset="-120"/>
+              </a:rPr>
+              <a:t>Not started</a:t>
             </a:r>
             <a:endParaRPr lang="en-US" sz="1100" dirty="0"/>
           </a:p>
@@ -5136,7 +5136,7 @@
       </p:grpSpPr>
       <p:pic>
         <p:nvPicPr>
-          <p:cNvPr id="2" name="Image 0" descr="/var/folders/lw/rmylcyvd5rjfxk9g1z9rrm8w0000gq/T/showship-deck-dePtSj/trail_bookend.png">    </p:cNvPr>
+          <p:cNvPr id="2" name="Image 0" descr="/var/folders/lw/rmylcyvd5rjfxk9g1z9rrm8w0000gq/T/showship-deck-hW3qWQ/trail_bookend.png">    </p:cNvPr>
           <p:cNvPicPr>
             <a:picLocks noChangeAspect="1"/>
           </p:cNvPicPr>
@@ -5160,7 +5160,7 @@
       </p:pic>
       <p:pic>
         <p:nvPicPr>
-          <p:cNvPr id="3" name="Image 1" descr="/var/folders/lw/rmylcyvd5rjfxk9g1z9rrm8w0000gq/T/showship-deck-dePtSj/logo_trimmed.png">    </p:cNvPr>
+          <p:cNvPr id="3" name="Image 1" descr="/var/folders/lw/rmylcyvd5rjfxk9g1z9rrm8w0000gq/T/showship-deck-hW3qWQ/logo_trimmed.png">    </p:cNvPr>
           <p:cNvPicPr>
             <a:picLocks noChangeAspect="1"/>
           </p:cNvPicPr>
@@ -5458,7 +5458,7 @@
       </p:sp>
       <p:pic>
         <p:nvPicPr>
-          <p:cNvPr id="11" name="Image 2" descr="/var/folders/lw/rmylcyvd5rjfxk9g1z9rrm8w0000gq/T/showship-deck-dePtSj/trail_mark.png">    </p:cNvPr>
+          <p:cNvPr id="11" name="Image 2" descr="/var/folders/lw/rmylcyvd5rjfxk9g1z9rrm8w0000gq/T/showship-deck-hW3qWQ/trail_mark.png">    </p:cNvPr>
           <p:cNvPicPr>
             <a:picLocks noChangeAspect="1"/>
           </p:cNvPicPr>
@@ -5567,7 +5567,7 @@
       </p:grpSpPr>
       <p:pic>
         <p:nvPicPr>
-          <p:cNvPr id="2" name="Image 0" descr="/var/folders/lw/rmylcyvd5rjfxk9g1z9rrm8w0000gq/T/showship-deck-dePtSj/trail_corner.png">    </p:cNvPr>
+          <p:cNvPr id="2" name="Image 0" descr="/var/folders/lw/rmylcyvd5rjfxk9g1z9rrm8w0000gq/T/showship-deck-hW3qWQ/trail_corner.png">    </p:cNvPr>
           <p:cNvPicPr>
             <a:picLocks noChangeAspect="1"/>
           </p:cNvPicPr>
@@ -5691,7 +5691,7 @@
       </p:sp>
       <p:pic>
         <p:nvPicPr>
-          <p:cNvPr id="6" name="Image 1" descr="/var/folders/lw/rmylcyvd5rjfxk9g1z9rrm8w0000gq/T/showship-deck-dePtSj/trail_mark.png">    </p:cNvPr>
+          <p:cNvPr id="6" name="Image 1" descr="/var/folders/lw/rmylcyvd5rjfxk9g1z9rrm8w0000gq/T/showship-deck-hW3qWQ/trail_mark.png">    </p:cNvPr>
           <p:cNvPicPr>
             <a:picLocks noChangeAspect="1"/>
           </p:cNvPicPr>
@@ -7009,7 +7009,7 @@
       </p:grpSpPr>
       <p:pic>
         <p:nvPicPr>
-          <p:cNvPr id="2" name="Image 0" descr="/var/folders/lw/rmylcyvd5rjfxk9g1z9rrm8w0000gq/T/showship-deck-dePtSj/trail_corner.png">    </p:cNvPr>
+          <p:cNvPr id="2" name="Image 0" descr="/var/folders/lw/rmylcyvd5rjfxk9g1z9rrm8w0000gq/T/showship-deck-hW3qWQ/trail_corner.png">    </p:cNvPr>
           <p:cNvPicPr>
             <a:picLocks noChangeAspect="1"/>
           </p:cNvPicPr>
@@ -7133,7 +7133,7 @@
       </p:sp>
       <p:pic>
         <p:nvPicPr>
-          <p:cNvPr id="6" name="Image 1" descr="/var/folders/lw/rmylcyvd5rjfxk9g1z9rrm8w0000gq/T/showship-deck-dePtSj/trail_mark.png">    </p:cNvPr>
+          <p:cNvPr id="6" name="Image 1" descr="/var/folders/lw/rmylcyvd5rjfxk9g1z9rrm8w0000gq/T/showship-deck-hW3qWQ/trail_mark.png">    </p:cNvPr>
           <p:cNvPicPr>
             <a:picLocks noChangeAspect="1"/>
           </p:cNvPicPr>
@@ -7310,7 +7310,7 @@
       </p:sp>
       <p:pic>
         <p:nvPicPr>
-          <p:cNvPr id="11" name="Image 2" descr="/var/folders/lw/rmylcyvd5rjfxk9g1z9rrm8w0000gq/T/showship-deck-dePtSj/trail_tl_1.png">    </p:cNvPr>
+          <p:cNvPr id="11" name="Image 2" descr="/var/folders/lw/rmylcyvd5rjfxk9g1z9rrm8w0000gq/T/showship-deck-hW3qWQ/trail_tl_1.png">    </p:cNvPr>
           <p:cNvPicPr>
             <a:picLocks noChangeAspect="1"/>
           </p:cNvPicPr>
@@ -8270,7 +8270,7 @@
       </p:grpSpPr>
       <p:pic>
         <p:nvPicPr>
-          <p:cNvPr id="2" name="Image 0" descr="/var/folders/lw/rmylcyvd5rjfxk9g1z9rrm8w0000gq/T/showship-deck-dePtSj/trail_corner.png">    </p:cNvPr>
+          <p:cNvPr id="2" name="Image 0" descr="/var/folders/lw/rmylcyvd5rjfxk9g1z9rrm8w0000gq/T/showship-deck-hW3qWQ/trail_corner.png">    </p:cNvPr>
           <p:cNvPicPr>
             <a:picLocks noChangeAspect="1"/>
           </p:cNvPicPr>
@@ -8394,7 +8394,7 @@
       </p:sp>
       <p:pic>
         <p:nvPicPr>
-          <p:cNvPr id="6" name="Image 1" descr="/var/folders/lw/rmylcyvd5rjfxk9g1z9rrm8w0000gq/T/showship-deck-dePtSj/trail_mark.png">    </p:cNvPr>
+          <p:cNvPr id="6" name="Image 1" descr="/var/folders/lw/rmylcyvd5rjfxk9g1z9rrm8w0000gq/T/showship-deck-hW3qWQ/trail_mark.png">    </p:cNvPr>
           <p:cNvPicPr>
             <a:picLocks noChangeAspect="1"/>
           </p:cNvPicPr>
@@ -9671,7 +9671,7 @@
       </p:grpSpPr>
       <p:pic>
         <p:nvPicPr>
-          <p:cNvPr id="2" name="Image 0" descr="/var/folders/lw/rmylcyvd5rjfxk9g1z9rrm8w0000gq/T/showship-deck-dePtSj/trail_corner.png">    </p:cNvPr>
+          <p:cNvPr id="2" name="Image 0" descr="/var/folders/lw/rmylcyvd5rjfxk9g1z9rrm8w0000gq/T/showship-deck-hW3qWQ/trail_corner.png">    </p:cNvPr>
           <p:cNvPicPr>
             <a:picLocks noChangeAspect="1"/>
           </p:cNvPicPr>
@@ -9795,7 +9795,7 @@
       </p:sp>
       <p:pic>
         <p:nvPicPr>
-          <p:cNvPr id="6" name="Image 1" descr="/var/folders/lw/rmylcyvd5rjfxk9g1z9rrm8w0000gq/T/showship-deck-dePtSj/trail_mark.png">    </p:cNvPr>
+          <p:cNvPr id="6" name="Image 1" descr="/var/folders/lw/rmylcyvd5rjfxk9g1z9rrm8w0000gq/T/showship-deck-hW3qWQ/trail_mark.png">    </p:cNvPr>
           <p:cNvPicPr>
             <a:picLocks noChangeAspect="1"/>
           </p:cNvPicPr>
@@ -11335,7 +11335,7 @@
       </p:grpSpPr>
       <p:pic>
         <p:nvPicPr>
-          <p:cNvPr id="2" name="Image 0" descr="/var/folders/lw/rmylcyvd5rjfxk9g1z9rrm8w0000gq/T/showship-deck-dePtSj/trail_corner.png">    </p:cNvPr>
+          <p:cNvPr id="2" name="Image 0" descr="/var/folders/lw/rmylcyvd5rjfxk9g1z9rrm8w0000gq/T/showship-deck-hW3qWQ/trail_corner.png">    </p:cNvPr>
           <p:cNvPicPr>
             <a:picLocks noChangeAspect="1"/>
           </p:cNvPicPr>
@@ -11459,7 +11459,7 @@
       </p:sp>
       <p:pic>
         <p:nvPicPr>
-          <p:cNvPr id="6" name="Image 1" descr="/var/folders/lw/rmylcyvd5rjfxk9g1z9rrm8w0000gq/T/showship-deck-dePtSj/trail_mark.png">    </p:cNvPr>
+          <p:cNvPr id="6" name="Image 1" descr="/var/folders/lw/rmylcyvd5rjfxk9g1z9rrm8w0000gq/T/showship-deck-hW3qWQ/trail_mark.png">    </p:cNvPr>
           <p:cNvPicPr>
             <a:picLocks noChangeAspect="1"/>
           </p:cNvPicPr>
@@ -13188,7 +13188,7 @@
       </p:grpSpPr>
       <p:pic>
         <p:nvPicPr>
-          <p:cNvPr id="2" name="Image 0" descr="/var/folders/lw/rmylcyvd5rjfxk9g1z9rrm8w0000gq/T/showship-deck-dePtSj/trail_corner.png">    </p:cNvPr>
+          <p:cNvPr id="2" name="Image 0" descr="/var/folders/lw/rmylcyvd5rjfxk9g1z9rrm8w0000gq/T/showship-deck-hW3qWQ/trail_corner.png">    </p:cNvPr>
           <p:cNvPicPr>
             <a:picLocks noChangeAspect="1"/>
           </p:cNvPicPr>
@@ -13312,7 +13312,7 @@
       </p:sp>
       <p:pic>
         <p:nvPicPr>
-          <p:cNvPr id="6" name="Image 1" descr="/var/folders/lw/rmylcyvd5rjfxk9g1z9rrm8w0000gq/T/showship-deck-dePtSj/trail_mark.png">    </p:cNvPr>
+          <p:cNvPr id="6" name="Image 1" descr="/var/folders/lw/rmylcyvd5rjfxk9g1z9rrm8w0000gq/T/showship-deck-hW3qWQ/trail_mark.png">    </p:cNvPr>
           <p:cNvPicPr>
             <a:picLocks noChangeAspect="1"/>
           </p:cNvPicPr>
@@ -13804,7 +13804,7 @@
       </p:sp>
       <p:pic>
         <p:nvPicPr>
-          <p:cNvPr id="20" name="Image 2" descr="/var/folders/lw/rmylcyvd5rjfxk9g1z9rrm8w0000gq/T/showship-deck-dePtSj/iconc_Check_FFFFFF.png">    </p:cNvPr>
+          <p:cNvPr id="20" name="Image 2" descr="/var/folders/lw/rmylcyvd5rjfxk9g1z9rrm8w0000gq/T/showship-deck-hW3qWQ/iconc_Check_FFFFFF.png">    </p:cNvPr>
           <p:cNvPicPr>
             <a:picLocks noChangeAspect="1"/>
           </p:cNvPicPr>
@@ -14026,7 +14026,7 @@
       </p:sp>
       <p:pic>
         <p:nvPicPr>
-          <p:cNvPr id="27" name="Image 3" descr="/var/folders/lw/rmylcyvd5rjfxk9g1z9rrm8w0000gq/T/showship-deck-dePtSj/iconc_Wrench_FFFFFF.png">    </p:cNvPr>
+          <p:cNvPr id="27" name="Image 3" descr="/var/folders/lw/rmylcyvd5rjfxk9g1z9rrm8w0000gq/T/showship-deck-hW3qWQ/iconc_Wrench_FFFFFF.png">    </p:cNvPr>
           <p:cNvPicPr>
             <a:picLocks noChangeAspect="1"/>
           </p:cNvPicPr>
@@ -14248,7 +14248,7 @@
       </p:sp>
       <p:pic>
         <p:nvPicPr>
-          <p:cNvPr id="34" name="Image 4" descr="/var/folders/lw/rmylcyvd5rjfxk9g1z9rrm8w0000gq/T/showship-deck-dePtSj/iconc_Check_FFFFFF.png">    </p:cNvPr>
+          <p:cNvPr id="34" name="Image 4" descr="/var/folders/lw/rmylcyvd5rjfxk9g1z9rrm8w0000gq/T/showship-deck-hW3qWQ/iconc_Check_FFFFFF.png">    </p:cNvPr>
           <p:cNvPicPr>
             <a:picLocks noChangeAspect="1"/>
           </p:cNvPicPr>
@@ -14487,7 +14487,7 @@
       </p:grpSpPr>
       <p:pic>
         <p:nvPicPr>
-          <p:cNvPr id="2" name="Image 0" descr="/var/folders/lw/rmylcyvd5rjfxk9g1z9rrm8w0000gq/T/showship-deck-dePtSj/trail_corner.png">    </p:cNvPr>
+          <p:cNvPr id="2" name="Image 0" descr="/var/folders/lw/rmylcyvd5rjfxk9g1z9rrm8w0000gq/T/showship-deck-hW3qWQ/trail_corner.png">    </p:cNvPr>
           <p:cNvPicPr>
             <a:picLocks noChangeAspect="1"/>
           </p:cNvPicPr>
@@ -14611,7 +14611,7 @@
       </p:sp>
       <p:pic>
         <p:nvPicPr>
-          <p:cNvPr id="6" name="Image 1" descr="/var/folders/lw/rmylcyvd5rjfxk9g1z9rrm8w0000gq/T/showship-deck-dePtSj/trail_mark.png">    </p:cNvPr>
+          <p:cNvPr id="6" name="Image 1" descr="/var/folders/lw/rmylcyvd5rjfxk9g1z9rrm8w0000gq/T/showship-deck-hW3qWQ/trail_mark.png">    </p:cNvPr>
           <p:cNvPicPr>
             <a:picLocks noChangeAspect="1"/>
           </p:cNvPicPr>
@@ -14803,7 +14803,7 @@
       </p:sp>
       <p:pic>
         <p:nvPicPr>
-          <p:cNvPr id="12" name="Image 2" descr="/var/folders/lw/rmylcyvd5rjfxk9g1z9rrm8w0000gq/T/showship-deck-dePtSj/iconc_TriangleAlert_FFFFFF.png">    </p:cNvPr>
+          <p:cNvPr id="12" name="Image 2" descr="/var/folders/lw/rmylcyvd5rjfxk9g1z9rrm8w0000gq/T/showship-deck-hW3qWQ/iconc_TriangleAlert_FFFFFF.png">    </p:cNvPr>
           <p:cNvPicPr>
             <a:picLocks noChangeAspect="1"/>
           </p:cNvPicPr>
@@ -15133,7 +15133,7 @@
       </p:sp>
       <p:pic>
         <p:nvPicPr>
-          <p:cNvPr id="21" name="Image 3" descr="/var/folders/lw/rmylcyvd5rjfxk9g1z9rrm8w0000gq/T/showship-deck-dePtSj/iconc_MessageCircleQuestion_FFFFFF.png">    </p:cNvPr>
+          <p:cNvPr id="21" name="Image 3" descr="/var/folders/lw/rmylcyvd5rjfxk9g1z9rrm8w0000gq/T/showship-deck-hW3qWQ/iconc_MessageCircleQuestion_FFFFFF.png">    </p:cNvPr>
           <p:cNvPicPr>
             <a:picLocks noChangeAspect="1"/>
           </p:cNvPicPr>
@@ -15419,7 +15419,7 @@
       </p:grpSpPr>
       <p:pic>
         <p:nvPicPr>
-          <p:cNvPr id="2" name="Image 0" descr="/var/folders/lw/rmylcyvd5rjfxk9g1z9rrm8w0000gq/T/showship-deck-dePtSj/trail_corner.png">    </p:cNvPr>
+          <p:cNvPr id="2" name="Image 0" descr="/var/folders/lw/rmylcyvd5rjfxk9g1z9rrm8w0000gq/T/showship-deck-hW3qWQ/trail_corner.png">    </p:cNvPr>
           <p:cNvPicPr>
             <a:picLocks noChangeAspect="1"/>
           </p:cNvPicPr>
@@ -15543,7 +15543,7 @@
       </p:sp>
       <p:pic>
         <p:nvPicPr>
-          <p:cNvPr id="6" name="Image 1" descr="/var/folders/lw/rmylcyvd5rjfxk9g1z9rrm8w0000gq/T/showship-deck-dePtSj/trail_mark.png">    </p:cNvPr>
+          <p:cNvPr id="6" name="Image 1" descr="/var/folders/lw/rmylcyvd5rjfxk9g1z9rrm8w0000gq/T/showship-deck-hW3qWQ/trail_mark.png">    </p:cNvPr>
           <p:cNvPicPr>
             <a:picLocks noChangeAspect="1"/>
           </p:cNvPicPr>

--- a/src/assets/downloads/example-deck-showship.pptx
+++ b/src/assets/downloads/example-deck-showship.pptx
@@ -2360,7 +2360,7 @@
       </p:grpSpPr>
       <p:pic>
         <p:nvPicPr>
-          <p:cNvPr id="2" name="Image 0" descr="/var/folders/lw/rmylcyvd5rjfxk9g1z9rrm8w0000gq/T/showship-deck-hW3qWQ/trail_bookend.png">    </p:cNvPr>
+          <p:cNvPr id="2" name="Image 0" descr="/var/folders/lw/rmylcyvd5rjfxk9g1z9rrm8w0000gq/T/showship-deck-bRwUC6/trail_bookend.png">    </p:cNvPr>
           <p:cNvPicPr>
             <a:picLocks noChangeAspect="1"/>
           </p:cNvPicPr>
@@ -2384,7 +2384,7 @@
       </p:pic>
       <p:pic>
         <p:nvPicPr>
-          <p:cNvPr id="3" name="Image 1" descr="/var/folders/lw/rmylcyvd5rjfxk9g1z9rrm8w0000gq/T/showship-deck-hW3qWQ/logo_trimmed.png">    </p:cNvPr>
+          <p:cNvPr id="3" name="Image 1" descr="/var/folders/lw/rmylcyvd5rjfxk9g1z9rrm8w0000gq/T/showship-deck-bRwUC6/logo_trimmed.png">    </p:cNvPr>
           <p:cNvPicPr>
             <a:picLocks noChangeAspect="1"/>
           </p:cNvPicPr>
@@ -2705,7 +2705,7 @@
       </p:sp>
       <p:pic>
         <p:nvPicPr>
-          <p:cNvPr id="11" name="Image 2" descr="/var/folders/lw/rmylcyvd5rjfxk9g1z9rrm8w0000gq/T/showship-deck-hW3qWQ/trail_mark.png">    </p:cNvPr>
+          <p:cNvPr id="11" name="Image 2" descr="/var/folders/lw/rmylcyvd5rjfxk9g1z9rrm8w0000gq/T/showship-deck-bRwUC6/trail_mark.png">    </p:cNvPr>
           <p:cNvPicPr>
             <a:picLocks noChangeAspect="1"/>
           </p:cNvPicPr>
@@ -2814,7 +2814,7 @@
       </p:grpSpPr>
       <p:pic>
         <p:nvPicPr>
-          <p:cNvPr id="2" name="Image 0" descr="/var/folders/lw/rmylcyvd5rjfxk9g1z9rrm8w0000gq/T/showship-deck-hW3qWQ/trail_corner.png">    </p:cNvPr>
+          <p:cNvPr id="2" name="Image 0" descr="/var/folders/lw/rmylcyvd5rjfxk9g1z9rrm8w0000gq/T/showship-deck-bRwUC6/trail_corner.png">    </p:cNvPr>
           <p:cNvPicPr>
             <a:picLocks noChangeAspect="1"/>
           </p:cNvPicPr>
@@ -2938,7 +2938,7 @@
       </p:sp>
       <p:pic>
         <p:nvPicPr>
-          <p:cNvPr id="6" name="Image 1" descr="/var/folders/lw/rmylcyvd5rjfxk9g1z9rrm8w0000gq/T/showship-deck-hW3qWQ/trail_mark.png">    </p:cNvPr>
+          <p:cNvPr id="6" name="Image 1" descr="/var/folders/lw/rmylcyvd5rjfxk9g1z9rrm8w0000gq/T/showship-deck-bRwUC6/trail_mark.png">    </p:cNvPr>
           <p:cNvPicPr>
             <a:picLocks noChangeAspect="1"/>
           </p:cNvPicPr>
@@ -3512,7 +3512,7 @@
       </p:grpSpPr>
       <p:pic>
         <p:nvPicPr>
-          <p:cNvPr id="2" name="Image 0" descr="/var/folders/lw/rmylcyvd5rjfxk9g1z9rrm8w0000gq/T/showship-deck-hW3qWQ/trail_corner.png">    </p:cNvPr>
+          <p:cNvPr id="2" name="Image 0" descr="/var/folders/lw/rmylcyvd5rjfxk9g1z9rrm8w0000gq/T/showship-deck-bRwUC6/trail_corner.png">    </p:cNvPr>
           <p:cNvPicPr>
             <a:picLocks noChangeAspect="1"/>
           </p:cNvPicPr>
@@ -3636,7 +3636,7 @@
       </p:sp>
       <p:pic>
         <p:nvPicPr>
-          <p:cNvPr id="6" name="Image 1" descr="/var/folders/lw/rmylcyvd5rjfxk9g1z9rrm8w0000gq/T/showship-deck-hW3qWQ/trail_mark.png">    </p:cNvPr>
+          <p:cNvPr id="6" name="Image 1" descr="/var/folders/lw/rmylcyvd5rjfxk9g1z9rrm8w0000gq/T/showship-deck-bRwUC6/trail_mark.png">    </p:cNvPr>
           <p:cNvPicPr>
             <a:picLocks noChangeAspect="1"/>
           </p:cNvPicPr>
@@ -5136,7 +5136,7 @@
       </p:grpSpPr>
       <p:pic>
         <p:nvPicPr>
-          <p:cNvPr id="2" name="Image 0" descr="/var/folders/lw/rmylcyvd5rjfxk9g1z9rrm8w0000gq/T/showship-deck-hW3qWQ/trail_bookend.png">    </p:cNvPr>
+          <p:cNvPr id="2" name="Image 0" descr="/var/folders/lw/rmylcyvd5rjfxk9g1z9rrm8w0000gq/T/showship-deck-bRwUC6/trail_bookend.png">    </p:cNvPr>
           <p:cNvPicPr>
             <a:picLocks noChangeAspect="1"/>
           </p:cNvPicPr>
@@ -5160,7 +5160,7 @@
       </p:pic>
       <p:pic>
         <p:nvPicPr>
-          <p:cNvPr id="3" name="Image 1" descr="/var/folders/lw/rmylcyvd5rjfxk9g1z9rrm8w0000gq/T/showship-deck-hW3qWQ/logo_trimmed.png">    </p:cNvPr>
+          <p:cNvPr id="3" name="Image 1" descr="/var/folders/lw/rmylcyvd5rjfxk9g1z9rrm8w0000gq/T/showship-deck-bRwUC6/logo_trimmed.png">    </p:cNvPr>
           <p:cNvPicPr>
             <a:picLocks noChangeAspect="1"/>
           </p:cNvPicPr>
@@ -5458,7 +5458,7 @@
       </p:sp>
       <p:pic>
         <p:nvPicPr>
-          <p:cNvPr id="11" name="Image 2" descr="/var/folders/lw/rmylcyvd5rjfxk9g1z9rrm8w0000gq/T/showship-deck-hW3qWQ/trail_mark.png">    </p:cNvPr>
+          <p:cNvPr id="11" name="Image 2" descr="/var/folders/lw/rmylcyvd5rjfxk9g1z9rrm8w0000gq/T/showship-deck-bRwUC6/trail_mark.png">    </p:cNvPr>
           <p:cNvPicPr>
             <a:picLocks noChangeAspect="1"/>
           </p:cNvPicPr>
@@ -5567,7 +5567,7 @@
       </p:grpSpPr>
       <p:pic>
         <p:nvPicPr>
-          <p:cNvPr id="2" name="Image 0" descr="/var/folders/lw/rmylcyvd5rjfxk9g1z9rrm8w0000gq/T/showship-deck-hW3qWQ/trail_corner.png">    </p:cNvPr>
+          <p:cNvPr id="2" name="Image 0" descr="/var/folders/lw/rmylcyvd5rjfxk9g1z9rrm8w0000gq/T/showship-deck-bRwUC6/trail_corner.png">    </p:cNvPr>
           <p:cNvPicPr>
             <a:picLocks noChangeAspect="1"/>
           </p:cNvPicPr>
@@ -5691,7 +5691,7 @@
       </p:sp>
       <p:pic>
         <p:nvPicPr>
-          <p:cNvPr id="6" name="Image 1" descr="/var/folders/lw/rmylcyvd5rjfxk9g1z9rrm8w0000gq/T/showship-deck-hW3qWQ/trail_mark.png">    </p:cNvPr>
+          <p:cNvPr id="6" name="Image 1" descr="/var/folders/lw/rmylcyvd5rjfxk9g1z9rrm8w0000gq/T/showship-deck-bRwUC6/trail_mark.png">    </p:cNvPr>
           <p:cNvPicPr>
             <a:picLocks noChangeAspect="1"/>
           </p:cNvPicPr>
@@ -7009,7 +7009,7 @@
       </p:grpSpPr>
       <p:pic>
         <p:nvPicPr>
-          <p:cNvPr id="2" name="Image 0" descr="/var/folders/lw/rmylcyvd5rjfxk9g1z9rrm8w0000gq/T/showship-deck-hW3qWQ/trail_corner.png">    </p:cNvPr>
+          <p:cNvPr id="2" name="Image 0" descr="/var/folders/lw/rmylcyvd5rjfxk9g1z9rrm8w0000gq/T/showship-deck-bRwUC6/trail_corner.png">    </p:cNvPr>
           <p:cNvPicPr>
             <a:picLocks noChangeAspect="1"/>
           </p:cNvPicPr>
@@ -7133,7 +7133,7 @@
       </p:sp>
       <p:pic>
         <p:nvPicPr>
-          <p:cNvPr id="6" name="Image 1" descr="/var/folders/lw/rmylcyvd5rjfxk9g1z9rrm8w0000gq/T/showship-deck-hW3qWQ/trail_mark.png">    </p:cNvPr>
+          <p:cNvPr id="6" name="Image 1" descr="/var/folders/lw/rmylcyvd5rjfxk9g1z9rrm8w0000gq/T/showship-deck-bRwUC6/trail_mark.png">    </p:cNvPr>
           <p:cNvPicPr>
             <a:picLocks noChangeAspect="1"/>
           </p:cNvPicPr>
@@ -7310,7 +7310,7 @@
       </p:sp>
       <p:pic>
         <p:nvPicPr>
-          <p:cNvPr id="11" name="Image 2" descr="/var/folders/lw/rmylcyvd5rjfxk9g1z9rrm8w0000gq/T/showship-deck-hW3qWQ/trail_tl_1.png">    </p:cNvPr>
+          <p:cNvPr id="11" name="Image 2" descr="/var/folders/lw/rmylcyvd5rjfxk9g1z9rrm8w0000gq/T/showship-deck-bRwUC6/trail_tl_1.png">    </p:cNvPr>
           <p:cNvPicPr>
             <a:picLocks noChangeAspect="1"/>
           </p:cNvPicPr>
@@ -8270,7 +8270,7 @@
       </p:grpSpPr>
       <p:pic>
         <p:nvPicPr>
-          <p:cNvPr id="2" name="Image 0" descr="/var/folders/lw/rmylcyvd5rjfxk9g1z9rrm8w0000gq/T/showship-deck-hW3qWQ/trail_corner.png">    </p:cNvPr>
+          <p:cNvPr id="2" name="Image 0" descr="/var/folders/lw/rmylcyvd5rjfxk9g1z9rrm8w0000gq/T/showship-deck-bRwUC6/trail_corner.png">    </p:cNvPr>
           <p:cNvPicPr>
             <a:picLocks noChangeAspect="1"/>
           </p:cNvPicPr>
@@ -8394,7 +8394,7 @@
       </p:sp>
       <p:pic>
         <p:nvPicPr>
-          <p:cNvPr id="6" name="Image 1" descr="/var/folders/lw/rmylcyvd5rjfxk9g1z9rrm8w0000gq/T/showship-deck-hW3qWQ/trail_mark.png">    </p:cNvPr>
+          <p:cNvPr id="6" name="Image 1" descr="/var/folders/lw/rmylcyvd5rjfxk9g1z9rrm8w0000gq/T/showship-deck-bRwUC6/trail_mark.png">    </p:cNvPr>
           <p:cNvPicPr>
             <a:picLocks noChangeAspect="1"/>
           </p:cNvPicPr>
@@ -9671,7 +9671,7 @@
       </p:grpSpPr>
       <p:pic>
         <p:nvPicPr>
-          <p:cNvPr id="2" name="Image 0" descr="/var/folders/lw/rmylcyvd5rjfxk9g1z9rrm8w0000gq/T/showship-deck-hW3qWQ/trail_corner.png">    </p:cNvPr>
+          <p:cNvPr id="2" name="Image 0" descr="/var/folders/lw/rmylcyvd5rjfxk9g1z9rrm8w0000gq/T/showship-deck-bRwUC6/trail_corner.png">    </p:cNvPr>
           <p:cNvPicPr>
             <a:picLocks noChangeAspect="1"/>
           </p:cNvPicPr>
@@ -9795,7 +9795,7 @@
       </p:sp>
       <p:pic>
         <p:nvPicPr>
-          <p:cNvPr id="6" name="Image 1" descr="/var/folders/lw/rmylcyvd5rjfxk9g1z9rrm8w0000gq/T/showship-deck-hW3qWQ/trail_mark.png">    </p:cNvPr>
+          <p:cNvPr id="6" name="Image 1" descr="/var/folders/lw/rmylcyvd5rjfxk9g1z9rrm8w0000gq/T/showship-deck-bRwUC6/trail_mark.png">    </p:cNvPr>
           <p:cNvPicPr>
             <a:picLocks noChangeAspect="1"/>
           </p:cNvPicPr>
@@ -11335,7 +11335,7 @@
       </p:grpSpPr>
       <p:pic>
         <p:nvPicPr>
-          <p:cNvPr id="2" name="Image 0" descr="/var/folders/lw/rmylcyvd5rjfxk9g1z9rrm8w0000gq/T/showship-deck-hW3qWQ/trail_corner.png">    </p:cNvPr>
+          <p:cNvPr id="2" name="Image 0" descr="/var/folders/lw/rmylcyvd5rjfxk9g1z9rrm8w0000gq/T/showship-deck-bRwUC6/trail_corner.png">    </p:cNvPr>
           <p:cNvPicPr>
             <a:picLocks noChangeAspect="1"/>
           </p:cNvPicPr>
@@ -11459,7 +11459,7 @@
       </p:sp>
       <p:pic>
         <p:nvPicPr>
-          <p:cNvPr id="6" name="Image 1" descr="/var/folders/lw/rmylcyvd5rjfxk9g1z9rrm8w0000gq/T/showship-deck-hW3qWQ/trail_mark.png">    </p:cNvPr>
+          <p:cNvPr id="6" name="Image 1" descr="/var/folders/lw/rmylcyvd5rjfxk9g1z9rrm8w0000gq/T/showship-deck-bRwUC6/trail_mark.png">    </p:cNvPr>
           <p:cNvPicPr>
             <a:picLocks noChangeAspect="1"/>
           </p:cNvPicPr>
@@ -13188,7 +13188,7 @@
       </p:grpSpPr>
       <p:pic>
         <p:nvPicPr>
-          <p:cNvPr id="2" name="Image 0" descr="/var/folders/lw/rmylcyvd5rjfxk9g1z9rrm8w0000gq/T/showship-deck-hW3qWQ/trail_corner.png">    </p:cNvPr>
+          <p:cNvPr id="2" name="Image 0" descr="/var/folders/lw/rmylcyvd5rjfxk9g1z9rrm8w0000gq/T/showship-deck-bRwUC6/trail_corner.png">    </p:cNvPr>
           <p:cNvPicPr>
             <a:picLocks noChangeAspect="1"/>
           </p:cNvPicPr>
@@ -13312,7 +13312,7 @@
       </p:sp>
       <p:pic>
         <p:nvPicPr>
-          <p:cNvPr id="6" name="Image 1" descr="/var/folders/lw/rmylcyvd5rjfxk9g1z9rrm8w0000gq/T/showship-deck-hW3qWQ/trail_mark.png">    </p:cNvPr>
+          <p:cNvPr id="6" name="Image 1" descr="/var/folders/lw/rmylcyvd5rjfxk9g1z9rrm8w0000gq/T/showship-deck-bRwUC6/trail_mark.png">    </p:cNvPr>
           <p:cNvPicPr>
             <a:picLocks noChangeAspect="1"/>
           </p:cNvPicPr>
@@ -13804,7 +13804,7 @@
       </p:sp>
       <p:pic>
         <p:nvPicPr>
-          <p:cNvPr id="20" name="Image 2" descr="/var/folders/lw/rmylcyvd5rjfxk9g1z9rrm8w0000gq/T/showship-deck-hW3qWQ/iconc_Check_FFFFFF.png">    </p:cNvPr>
+          <p:cNvPr id="20" name="Image 2" descr="/var/folders/lw/rmylcyvd5rjfxk9g1z9rrm8w0000gq/T/showship-deck-bRwUC6/iconc_Check_FFFFFF.png">    </p:cNvPr>
           <p:cNvPicPr>
             <a:picLocks noChangeAspect="1"/>
           </p:cNvPicPr>
@@ -14026,7 +14026,7 @@
       </p:sp>
       <p:pic>
         <p:nvPicPr>
-          <p:cNvPr id="27" name="Image 3" descr="/var/folders/lw/rmylcyvd5rjfxk9g1z9rrm8w0000gq/T/showship-deck-hW3qWQ/iconc_Wrench_FFFFFF.png">    </p:cNvPr>
+          <p:cNvPr id="27" name="Image 3" descr="/var/folders/lw/rmylcyvd5rjfxk9g1z9rrm8w0000gq/T/showship-deck-bRwUC6/iconc_Wrench_FFFFFF.png">    </p:cNvPr>
           <p:cNvPicPr>
             <a:picLocks noChangeAspect="1"/>
           </p:cNvPicPr>
@@ -14248,7 +14248,7 @@
       </p:sp>
       <p:pic>
         <p:nvPicPr>
-          <p:cNvPr id="34" name="Image 4" descr="/var/folders/lw/rmylcyvd5rjfxk9g1z9rrm8w0000gq/T/showship-deck-hW3qWQ/iconc_Check_FFFFFF.png">    </p:cNvPr>
+          <p:cNvPr id="34" name="Image 4" descr="/var/folders/lw/rmylcyvd5rjfxk9g1z9rrm8w0000gq/T/showship-deck-bRwUC6/iconc_Check_FFFFFF.png">    </p:cNvPr>
           <p:cNvPicPr>
             <a:picLocks noChangeAspect="1"/>
           </p:cNvPicPr>
@@ -14487,7 +14487,7 @@
       </p:grpSpPr>
       <p:pic>
         <p:nvPicPr>
-          <p:cNvPr id="2" name="Image 0" descr="/var/folders/lw/rmylcyvd5rjfxk9g1z9rrm8w0000gq/T/showship-deck-hW3qWQ/trail_corner.png">    </p:cNvPr>
+          <p:cNvPr id="2" name="Image 0" descr="/var/folders/lw/rmylcyvd5rjfxk9g1z9rrm8w0000gq/T/showship-deck-bRwUC6/trail_corner.png">    </p:cNvPr>
           <p:cNvPicPr>
             <a:picLocks noChangeAspect="1"/>
           </p:cNvPicPr>
@@ -14611,7 +14611,7 @@
       </p:sp>
       <p:pic>
         <p:nvPicPr>
-          <p:cNvPr id="6" name="Image 1" descr="/var/folders/lw/rmylcyvd5rjfxk9g1z9rrm8w0000gq/T/showship-deck-hW3qWQ/trail_mark.png">    </p:cNvPr>
+          <p:cNvPr id="6" name="Image 1" descr="/var/folders/lw/rmylcyvd5rjfxk9g1z9rrm8w0000gq/T/showship-deck-bRwUC6/trail_mark.png">    </p:cNvPr>
           <p:cNvPicPr>
             <a:picLocks noChangeAspect="1"/>
           </p:cNvPicPr>
@@ -14803,7 +14803,7 @@
       </p:sp>
       <p:pic>
         <p:nvPicPr>
-          <p:cNvPr id="12" name="Image 2" descr="/var/folders/lw/rmylcyvd5rjfxk9g1z9rrm8w0000gq/T/showship-deck-hW3qWQ/iconc_TriangleAlert_FFFFFF.png">    </p:cNvPr>
+          <p:cNvPr id="12" name="Image 2" descr="/var/folders/lw/rmylcyvd5rjfxk9g1z9rrm8w0000gq/T/showship-deck-bRwUC6/iconc_TriangleAlert_FFFFFF.png">    </p:cNvPr>
           <p:cNvPicPr>
             <a:picLocks noChangeAspect="1"/>
           </p:cNvPicPr>
@@ -15133,7 +15133,7 @@
       </p:sp>
       <p:pic>
         <p:nvPicPr>
-          <p:cNvPr id="21" name="Image 3" descr="/var/folders/lw/rmylcyvd5rjfxk9g1z9rrm8w0000gq/T/showship-deck-hW3qWQ/iconc_MessageCircleQuestion_FFFFFF.png">    </p:cNvPr>
+          <p:cNvPr id="21" name="Image 3" descr="/var/folders/lw/rmylcyvd5rjfxk9g1z9rrm8w0000gq/T/showship-deck-bRwUC6/iconc_MessageCircleQuestion_FFFFFF.png">    </p:cNvPr>
           <p:cNvPicPr>
             <a:picLocks noChangeAspect="1"/>
           </p:cNvPicPr>
@@ -15419,7 +15419,7 @@
       </p:grpSpPr>
       <p:pic>
         <p:nvPicPr>
-          <p:cNvPr id="2" name="Image 0" descr="/var/folders/lw/rmylcyvd5rjfxk9g1z9rrm8w0000gq/T/showship-deck-hW3qWQ/trail_corner.png">    </p:cNvPr>
+          <p:cNvPr id="2" name="Image 0" descr="/var/folders/lw/rmylcyvd5rjfxk9g1z9rrm8w0000gq/T/showship-deck-bRwUC6/trail_corner.png">    </p:cNvPr>
           <p:cNvPicPr>
             <a:picLocks noChangeAspect="1"/>
           </p:cNvPicPr>
@@ -15543,7 +15543,7 @@
       </p:sp>
       <p:pic>
         <p:nvPicPr>
-          <p:cNvPr id="6" name="Image 1" descr="/var/folders/lw/rmylcyvd5rjfxk9g1z9rrm8w0000gq/T/showship-deck-hW3qWQ/trail_mark.png">    </p:cNvPr>
+          <p:cNvPr id="6" name="Image 1" descr="/var/folders/lw/rmylcyvd5rjfxk9g1z9rrm8w0000gq/T/showship-deck-bRwUC6/trail_mark.png">    </p:cNvPr>
           <p:cNvPicPr>
             <a:picLocks noChangeAspect="1"/>
           </p:cNvPicPr>

--- a/src/assets/downloads/example-deck-showship.pptx
+++ b/src/assets/downloads/example-deck-showship.pptx
@@ -2360,7 +2360,7 @@
       </p:grpSpPr>
       <p:pic>
         <p:nvPicPr>
-          <p:cNvPr id="2" name="Image 0" descr="/var/folders/lw/rmylcyvd5rjfxk9g1z9rrm8w0000gq/T/showship-deck-bRwUC6/trail_bookend.png">    </p:cNvPr>
+          <p:cNvPr id="2" name="Image 0" descr="/var/folders/lw/rmylcyvd5rjfxk9g1z9rrm8w0000gq/T/showship-deck-TUNW17/trail_bookend.png">    </p:cNvPr>
           <p:cNvPicPr>
             <a:picLocks noChangeAspect="1"/>
           </p:cNvPicPr>
@@ -2384,7 +2384,7 @@
       </p:pic>
       <p:pic>
         <p:nvPicPr>
-          <p:cNvPr id="3" name="Image 1" descr="/var/folders/lw/rmylcyvd5rjfxk9g1z9rrm8w0000gq/T/showship-deck-bRwUC6/logo_trimmed.png">    </p:cNvPr>
+          <p:cNvPr id="3" name="Image 1" descr="/var/folders/lw/rmylcyvd5rjfxk9g1z9rrm8w0000gq/T/showship-deck-TUNW17/logo_trimmed.png">    </p:cNvPr>
           <p:cNvPicPr>
             <a:picLocks noChangeAspect="1"/>
           </p:cNvPicPr>
@@ -2705,7 +2705,7 @@
       </p:sp>
       <p:pic>
         <p:nvPicPr>
-          <p:cNvPr id="11" name="Image 2" descr="/var/folders/lw/rmylcyvd5rjfxk9g1z9rrm8w0000gq/T/showship-deck-bRwUC6/trail_mark.png">    </p:cNvPr>
+          <p:cNvPr id="11" name="Image 2" descr="/var/folders/lw/rmylcyvd5rjfxk9g1z9rrm8w0000gq/T/showship-deck-TUNW17/trail_mark.png">    </p:cNvPr>
           <p:cNvPicPr>
             <a:picLocks noChangeAspect="1"/>
           </p:cNvPicPr>
@@ -2814,7 +2814,7 @@
       </p:grpSpPr>
       <p:pic>
         <p:nvPicPr>
-          <p:cNvPr id="2" name="Image 0" descr="/var/folders/lw/rmylcyvd5rjfxk9g1z9rrm8w0000gq/T/showship-deck-bRwUC6/trail_corner.png">    </p:cNvPr>
+          <p:cNvPr id="2" name="Image 0" descr="/var/folders/lw/rmylcyvd5rjfxk9g1z9rrm8w0000gq/T/showship-deck-TUNW17/trail_corner.png">    </p:cNvPr>
           <p:cNvPicPr>
             <a:picLocks noChangeAspect="1"/>
           </p:cNvPicPr>
@@ -2938,7 +2938,7 @@
       </p:sp>
       <p:pic>
         <p:nvPicPr>
-          <p:cNvPr id="6" name="Image 1" descr="/var/folders/lw/rmylcyvd5rjfxk9g1z9rrm8w0000gq/T/showship-deck-bRwUC6/trail_mark.png">    </p:cNvPr>
+          <p:cNvPr id="6" name="Image 1" descr="/var/folders/lw/rmylcyvd5rjfxk9g1z9rrm8w0000gq/T/showship-deck-TUNW17/trail_mark.png">    </p:cNvPr>
           <p:cNvPicPr>
             <a:picLocks noChangeAspect="1"/>
           </p:cNvPicPr>
@@ -3512,7 +3512,7 @@
       </p:grpSpPr>
       <p:pic>
         <p:nvPicPr>
-          <p:cNvPr id="2" name="Image 0" descr="/var/folders/lw/rmylcyvd5rjfxk9g1z9rrm8w0000gq/T/showship-deck-bRwUC6/trail_corner.png">    </p:cNvPr>
+          <p:cNvPr id="2" name="Image 0" descr="/var/folders/lw/rmylcyvd5rjfxk9g1z9rrm8w0000gq/T/showship-deck-TUNW17/trail_corner.png">    </p:cNvPr>
           <p:cNvPicPr>
             <a:picLocks noChangeAspect="1"/>
           </p:cNvPicPr>
@@ -3636,7 +3636,7 @@
       </p:sp>
       <p:pic>
         <p:nvPicPr>
-          <p:cNvPr id="6" name="Image 1" descr="/var/folders/lw/rmylcyvd5rjfxk9g1z9rrm8w0000gq/T/showship-deck-bRwUC6/trail_mark.png">    </p:cNvPr>
+          <p:cNvPr id="6" name="Image 1" descr="/var/folders/lw/rmylcyvd5rjfxk9g1z9rrm8w0000gq/T/showship-deck-TUNW17/trail_mark.png">    </p:cNvPr>
           <p:cNvPicPr>
             <a:picLocks noChangeAspect="1"/>
           </p:cNvPicPr>
@@ -5136,7 +5136,7 @@
       </p:grpSpPr>
       <p:pic>
         <p:nvPicPr>
-          <p:cNvPr id="2" name="Image 0" descr="/var/folders/lw/rmylcyvd5rjfxk9g1z9rrm8w0000gq/T/showship-deck-bRwUC6/trail_bookend.png">    </p:cNvPr>
+          <p:cNvPr id="2" name="Image 0" descr="/var/folders/lw/rmylcyvd5rjfxk9g1z9rrm8w0000gq/T/showship-deck-TUNW17/trail_bookend.png">    </p:cNvPr>
           <p:cNvPicPr>
             <a:picLocks noChangeAspect="1"/>
           </p:cNvPicPr>
@@ -5160,7 +5160,7 @@
       </p:pic>
       <p:pic>
         <p:nvPicPr>
-          <p:cNvPr id="3" name="Image 1" descr="/var/folders/lw/rmylcyvd5rjfxk9g1z9rrm8w0000gq/T/showship-deck-bRwUC6/logo_trimmed.png">    </p:cNvPr>
+          <p:cNvPr id="3" name="Image 1" descr="/var/folders/lw/rmylcyvd5rjfxk9g1z9rrm8w0000gq/T/showship-deck-TUNW17/logo_trimmed.png">    </p:cNvPr>
           <p:cNvPicPr>
             <a:picLocks noChangeAspect="1"/>
           </p:cNvPicPr>
@@ -5458,7 +5458,7 @@
       </p:sp>
       <p:pic>
         <p:nvPicPr>
-          <p:cNvPr id="11" name="Image 2" descr="/var/folders/lw/rmylcyvd5rjfxk9g1z9rrm8w0000gq/T/showship-deck-bRwUC6/trail_mark.png">    </p:cNvPr>
+          <p:cNvPr id="11" name="Image 2" descr="/var/folders/lw/rmylcyvd5rjfxk9g1z9rrm8w0000gq/T/showship-deck-TUNW17/trail_mark.png">    </p:cNvPr>
           <p:cNvPicPr>
             <a:picLocks noChangeAspect="1"/>
           </p:cNvPicPr>
@@ -5567,7 +5567,7 @@
       </p:grpSpPr>
       <p:pic>
         <p:nvPicPr>
-          <p:cNvPr id="2" name="Image 0" descr="/var/folders/lw/rmylcyvd5rjfxk9g1z9rrm8w0000gq/T/showship-deck-bRwUC6/trail_corner.png">    </p:cNvPr>
+          <p:cNvPr id="2" name="Image 0" descr="/var/folders/lw/rmylcyvd5rjfxk9g1z9rrm8w0000gq/T/showship-deck-TUNW17/trail_corner.png">    </p:cNvPr>
           <p:cNvPicPr>
             <a:picLocks noChangeAspect="1"/>
           </p:cNvPicPr>
@@ -5691,7 +5691,7 @@
       </p:sp>
       <p:pic>
         <p:nvPicPr>
-          <p:cNvPr id="6" name="Image 1" descr="/var/folders/lw/rmylcyvd5rjfxk9g1z9rrm8w0000gq/T/showship-deck-bRwUC6/trail_mark.png">    </p:cNvPr>
+          <p:cNvPr id="6" name="Image 1" descr="/var/folders/lw/rmylcyvd5rjfxk9g1z9rrm8w0000gq/T/showship-deck-TUNW17/trail_mark.png">    </p:cNvPr>
           <p:cNvPicPr>
             <a:picLocks noChangeAspect="1"/>
           </p:cNvPicPr>
@@ -7009,7 +7009,7 @@
       </p:grpSpPr>
       <p:pic>
         <p:nvPicPr>
-          <p:cNvPr id="2" name="Image 0" descr="/var/folders/lw/rmylcyvd5rjfxk9g1z9rrm8w0000gq/T/showship-deck-bRwUC6/trail_corner.png">    </p:cNvPr>
+          <p:cNvPr id="2" name="Image 0" descr="/var/folders/lw/rmylcyvd5rjfxk9g1z9rrm8w0000gq/T/showship-deck-TUNW17/trail_corner.png">    </p:cNvPr>
           <p:cNvPicPr>
             <a:picLocks noChangeAspect="1"/>
           </p:cNvPicPr>
@@ -7133,7 +7133,7 @@
       </p:sp>
       <p:pic>
         <p:nvPicPr>
-          <p:cNvPr id="6" name="Image 1" descr="/var/folders/lw/rmylcyvd5rjfxk9g1z9rrm8w0000gq/T/showship-deck-bRwUC6/trail_mark.png">    </p:cNvPr>
+          <p:cNvPr id="6" name="Image 1" descr="/var/folders/lw/rmylcyvd5rjfxk9g1z9rrm8w0000gq/T/showship-deck-TUNW17/trail_mark.png">    </p:cNvPr>
           <p:cNvPicPr>
             <a:picLocks noChangeAspect="1"/>
           </p:cNvPicPr>
@@ -7310,7 +7310,7 @@
       </p:sp>
       <p:pic>
         <p:nvPicPr>
-          <p:cNvPr id="11" name="Image 2" descr="/var/folders/lw/rmylcyvd5rjfxk9g1z9rrm8w0000gq/T/showship-deck-bRwUC6/trail_tl_1.png">    </p:cNvPr>
+          <p:cNvPr id="11" name="Image 2" descr="/var/folders/lw/rmylcyvd5rjfxk9g1z9rrm8w0000gq/T/showship-deck-TUNW17/trail_tl_1.png">    </p:cNvPr>
           <p:cNvPicPr>
             <a:picLocks noChangeAspect="1"/>
           </p:cNvPicPr>
@@ -8270,7 +8270,7 @@
       </p:grpSpPr>
       <p:pic>
         <p:nvPicPr>
-          <p:cNvPr id="2" name="Image 0" descr="/var/folders/lw/rmylcyvd5rjfxk9g1z9rrm8w0000gq/T/showship-deck-bRwUC6/trail_corner.png">    </p:cNvPr>
+          <p:cNvPr id="2" name="Image 0" descr="/var/folders/lw/rmylcyvd5rjfxk9g1z9rrm8w0000gq/T/showship-deck-TUNW17/trail_corner.png">    </p:cNvPr>
           <p:cNvPicPr>
             <a:picLocks noChangeAspect="1"/>
           </p:cNvPicPr>
@@ -8394,7 +8394,7 @@
       </p:sp>
       <p:pic>
         <p:nvPicPr>
-          <p:cNvPr id="6" name="Image 1" descr="/var/folders/lw/rmylcyvd5rjfxk9g1z9rrm8w0000gq/T/showship-deck-bRwUC6/trail_mark.png">    </p:cNvPr>
+          <p:cNvPr id="6" name="Image 1" descr="/var/folders/lw/rmylcyvd5rjfxk9g1z9rrm8w0000gq/T/showship-deck-TUNW17/trail_mark.png">    </p:cNvPr>
           <p:cNvPicPr>
             <a:picLocks noChangeAspect="1"/>
           </p:cNvPicPr>
@@ -9671,7 +9671,7 @@
       </p:grpSpPr>
       <p:pic>
         <p:nvPicPr>
-          <p:cNvPr id="2" name="Image 0" descr="/var/folders/lw/rmylcyvd5rjfxk9g1z9rrm8w0000gq/T/showship-deck-bRwUC6/trail_corner.png">    </p:cNvPr>
+          <p:cNvPr id="2" name="Image 0" descr="/var/folders/lw/rmylcyvd5rjfxk9g1z9rrm8w0000gq/T/showship-deck-TUNW17/trail_corner.png">    </p:cNvPr>
           <p:cNvPicPr>
             <a:picLocks noChangeAspect="1"/>
           </p:cNvPicPr>
@@ -9795,7 +9795,7 @@
       </p:sp>
       <p:pic>
         <p:nvPicPr>
-          <p:cNvPr id="6" name="Image 1" descr="/var/folders/lw/rmylcyvd5rjfxk9g1z9rrm8w0000gq/T/showship-deck-bRwUC6/trail_mark.png">    </p:cNvPr>
+          <p:cNvPr id="6" name="Image 1" descr="/var/folders/lw/rmylcyvd5rjfxk9g1z9rrm8w0000gq/T/showship-deck-TUNW17/trail_mark.png">    </p:cNvPr>
           <p:cNvPicPr>
             <a:picLocks noChangeAspect="1"/>
           </p:cNvPicPr>
@@ -11335,7 +11335,7 @@
       </p:grpSpPr>
       <p:pic>
         <p:nvPicPr>
-          <p:cNvPr id="2" name="Image 0" descr="/var/folders/lw/rmylcyvd5rjfxk9g1z9rrm8w0000gq/T/showship-deck-bRwUC6/trail_corner.png">    </p:cNvPr>
+          <p:cNvPr id="2" name="Image 0" descr="/var/folders/lw/rmylcyvd5rjfxk9g1z9rrm8w0000gq/T/showship-deck-TUNW17/trail_corner.png">    </p:cNvPr>
           <p:cNvPicPr>
             <a:picLocks noChangeAspect="1"/>
           </p:cNvPicPr>
@@ -11459,7 +11459,7 @@
       </p:sp>
       <p:pic>
         <p:nvPicPr>
-          <p:cNvPr id="6" name="Image 1" descr="/var/folders/lw/rmylcyvd5rjfxk9g1z9rrm8w0000gq/T/showship-deck-bRwUC6/trail_mark.png">    </p:cNvPr>
+          <p:cNvPr id="6" name="Image 1" descr="/var/folders/lw/rmylcyvd5rjfxk9g1z9rrm8w0000gq/T/showship-deck-TUNW17/trail_mark.png">    </p:cNvPr>
           <p:cNvPicPr>
             <a:picLocks noChangeAspect="1"/>
           </p:cNvPicPr>
@@ -13188,7 +13188,7 @@
       </p:grpSpPr>
       <p:pic>
         <p:nvPicPr>
-          <p:cNvPr id="2" name="Image 0" descr="/var/folders/lw/rmylcyvd5rjfxk9g1z9rrm8w0000gq/T/showship-deck-bRwUC6/trail_corner.png">    </p:cNvPr>
+          <p:cNvPr id="2" name="Image 0" descr="/var/folders/lw/rmylcyvd5rjfxk9g1z9rrm8w0000gq/T/showship-deck-TUNW17/trail_corner.png">    </p:cNvPr>
           <p:cNvPicPr>
             <a:picLocks noChangeAspect="1"/>
           </p:cNvPicPr>
@@ -13312,7 +13312,7 @@
       </p:sp>
       <p:pic>
         <p:nvPicPr>
-          <p:cNvPr id="6" name="Image 1" descr="/var/folders/lw/rmylcyvd5rjfxk9g1z9rrm8w0000gq/T/showship-deck-bRwUC6/trail_mark.png">    </p:cNvPr>
+          <p:cNvPr id="6" name="Image 1" descr="/var/folders/lw/rmylcyvd5rjfxk9g1z9rrm8w0000gq/T/showship-deck-TUNW17/trail_mark.png">    </p:cNvPr>
           <p:cNvPicPr>
             <a:picLocks noChangeAspect="1"/>
           </p:cNvPicPr>
@@ -13804,7 +13804,7 @@
       </p:sp>
       <p:pic>
         <p:nvPicPr>
-          <p:cNvPr id="20" name="Image 2" descr="/var/folders/lw/rmylcyvd5rjfxk9g1z9rrm8w0000gq/T/showship-deck-bRwUC6/iconc_Check_FFFFFF.png">    </p:cNvPr>
+          <p:cNvPr id="20" name="Image 2" descr="/var/folders/lw/rmylcyvd5rjfxk9g1z9rrm8w0000gq/T/showship-deck-TUNW17/iconc_Check_FFFFFF.png">    </p:cNvPr>
           <p:cNvPicPr>
             <a:picLocks noChangeAspect="1"/>
           </p:cNvPicPr>
@@ -14026,7 +14026,7 @@
       </p:sp>
       <p:pic>
         <p:nvPicPr>
-          <p:cNvPr id="27" name="Image 3" descr="/var/folders/lw/rmylcyvd5rjfxk9g1z9rrm8w0000gq/T/showship-deck-bRwUC6/iconc_Wrench_FFFFFF.png">    </p:cNvPr>
+          <p:cNvPr id="27" name="Image 3" descr="/var/folders/lw/rmylcyvd5rjfxk9g1z9rrm8w0000gq/T/showship-deck-TUNW17/iconc_Wrench_FFFFFF.png">    </p:cNvPr>
           <p:cNvPicPr>
             <a:picLocks noChangeAspect="1"/>
           </p:cNvPicPr>
@@ -14248,7 +14248,7 @@
       </p:sp>
       <p:pic>
         <p:nvPicPr>
-          <p:cNvPr id="34" name="Image 4" descr="/var/folders/lw/rmylcyvd5rjfxk9g1z9rrm8w0000gq/T/showship-deck-bRwUC6/iconc_Check_FFFFFF.png">    </p:cNvPr>
+          <p:cNvPr id="34" name="Image 4" descr="/var/folders/lw/rmylcyvd5rjfxk9g1z9rrm8w0000gq/T/showship-deck-TUNW17/iconc_Check_FFFFFF.png">    </p:cNvPr>
           <p:cNvPicPr>
             <a:picLocks noChangeAspect="1"/>
           </p:cNvPicPr>
@@ -14487,7 +14487,7 @@
       </p:grpSpPr>
       <p:pic>
         <p:nvPicPr>
-          <p:cNvPr id="2" name="Image 0" descr="/var/folders/lw/rmylcyvd5rjfxk9g1z9rrm8w0000gq/T/showship-deck-bRwUC6/trail_corner.png">    </p:cNvPr>
+          <p:cNvPr id="2" name="Image 0" descr="/var/folders/lw/rmylcyvd5rjfxk9g1z9rrm8w0000gq/T/showship-deck-TUNW17/trail_corner.png">    </p:cNvPr>
           <p:cNvPicPr>
             <a:picLocks noChangeAspect="1"/>
           </p:cNvPicPr>
@@ -14611,7 +14611,7 @@
       </p:sp>
       <p:pic>
         <p:nvPicPr>
-          <p:cNvPr id="6" name="Image 1" descr="/var/folders/lw/rmylcyvd5rjfxk9g1z9rrm8w0000gq/T/showship-deck-bRwUC6/trail_mark.png">    </p:cNvPr>
+          <p:cNvPr id="6" name="Image 1" descr="/var/folders/lw/rmylcyvd5rjfxk9g1z9rrm8w0000gq/T/showship-deck-TUNW17/trail_mark.png">    </p:cNvPr>
           <p:cNvPicPr>
             <a:picLocks noChangeAspect="1"/>
           </p:cNvPicPr>
@@ -14803,7 +14803,7 @@
       </p:sp>
       <p:pic>
         <p:nvPicPr>
-          <p:cNvPr id="12" name="Image 2" descr="/var/folders/lw/rmylcyvd5rjfxk9g1z9rrm8w0000gq/T/showship-deck-bRwUC6/iconc_TriangleAlert_FFFFFF.png">    </p:cNvPr>
+          <p:cNvPr id="12" name="Image 2" descr="/var/folders/lw/rmylcyvd5rjfxk9g1z9rrm8w0000gq/T/showship-deck-TUNW17/iconc_TriangleAlert_FFFFFF.png">    </p:cNvPr>
           <p:cNvPicPr>
             <a:picLocks noChangeAspect="1"/>
           </p:cNvPicPr>
@@ -15133,7 +15133,7 @@
       </p:sp>
       <p:pic>
         <p:nvPicPr>
-          <p:cNvPr id="21" name="Image 3" descr="/var/folders/lw/rmylcyvd5rjfxk9g1z9rrm8w0000gq/T/showship-deck-bRwUC6/iconc_MessageCircleQuestion_FFFFFF.png">    </p:cNvPr>
+          <p:cNvPr id="21" name="Image 3" descr="/var/folders/lw/rmylcyvd5rjfxk9g1z9rrm8w0000gq/T/showship-deck-TUNW17/iconc_MessageCircleQuestion_FFFFFF.png">    </p:cNvPr>
           <p:cNvPicPr>
             <a:picLocks noChangeAspect="1"/>
           </p:cNvPicPr>
@@ -15419,7 +15419,7 @@
       </p:grpSpPr>
       <p:pic>
         <p:nvPicPr>
-          <p:cNvPr id="2" name="Image 0" descr="/var/folders/lw/rmylcyvd5rjfxk9g1z9rrm8w0000gq/T/showship-deck-bRwUC6/trail_corner.png">    </p:cNvPr>
+          <p:cNvPr id="2" name="Image 0" descr="/var/folders/lw/rmylcyvd5rjfxk9g1z9rrm8w0000gq/T/showship-deck-TUNW17/trail_corner.png">    </p:cNvPr>
           <p:cNvPicPr>
             <a:picLocks noChangeAspect="1"/>
           </p:cNvPicPr>
@@ -15543,7 +15543,7 @@
       </p:sp>
       <p:pic>
         <p:nvPicPr>
-          <p:cNvPr id="6" name="Image 1" descr="/var/folders/lw/rmylcyvd5rjfxk9g1z9rrm8w0000gq/T/showship-deck-bRwUC6/trail_mark.png">    </p:cNvPr>
+          <p:cNvPr id="6" name="Image 1" descr="/var/folders/lw/rmylcyvd5rjfxk9g1z9rrm8w0000gq/T/showship-deck-TUNW17/trail_mark.png">    </p:cNvPr>
           <p:cNvPicPr>
             <a:picLocks noChangeAspect="1"/>
           </p:cNvPicPr>
